--- a/Dars materiallari 2025-2026/Sun'iy intellekt asoslari 2025-2026/1.9 Pythonda roʻyxatlarga doir masalalar yechish/1.9 Pythonda roʻyxatlarga doir masalalar yechish.pptx
+++ b/Dars materiallari 2025-2026/Sun'iy intellekt asoslari 2025-2026/1.9 Pythonda roʻyxatlarga doir masalalar yechish/1.9 Pythonda roʻyxatlarga doir masalalar yechish.pptx
@@ -10042,7 +10042,7 @@
                 <a:ea typeface="Corben" pitchFamily="34" charset="-122"/>
                 <a:cs typeface="Times New Roman" panose="02020603050405020304" pitchFamily="18" charset="0"/>
               </a:rPr>
-              <a:t>guruhli</a:t>
+              <a:t>amaliy</a:t>
             </a:r>
             <a:r>
               <a:rPr lang="en-US" sz="4450" dirty="0">
